--- a/publication/presentation.pptx
+++ b/publication/presentation.pptx
@@ -112,7 +112,7 @@
   </p:defaultTextStyle>
   <p:extLst>
     <p:ext uri="{EFAFB233-063F-42B5-8137-9DF3F51BA10A}">
-      <p15:sldGuideLst xmlns:p15="http://schemas.microsoft.com/office/powerpoint/2012/main">
+      <p15:sldGuideLst xmlns:p15="http://schemas.microsoft.com/office/powerpoint/2012/main" xmlns="">
         <p15:guide id="1" orient="horz" pos="2160">
           <p15:clr>
             <a:srgbClr val="A4A3A4"/>
@@ -151,7 +151,7 @@
           <p:cNvPr id="2" name="Заголовок 1">
             <a:extLst>
               <a:ext uri="{FF2B5EF4-FFF2-40B4-BE49-F238E27FC236}">
-                <a16:creationId xmlns:a16="http://schemas.microsoft.com/office/drawing/2014/main" id="{0873FD3F-7C18-EBB6-CB4A-D72BB89CE465}"/>
+                <a16:creationId xmlns:a16="http://schemas.microsoft.com/office/drawing/2014/main" xmlns="" id="{0873FD3F-7C18-EBB6-CB4A-D72BB89CE465}"/>
               </a:ext>
             </a:extLst>
           </p:cNvPr>
@@ -188,7 +188,7 @@
           <p:cNvPr id="3" name="Подзаголовок 2">
             <a:extLst>
               <a:ext uri="{FF2B5EF4-FFF2-40B4-BE49-F238E27FC236}">
-                <a16:creationId xmlns:a16="http://schemas.microsoft.com/office/drawing/2014/main" id="{99B4D07D-91DC-57C7-134C-6F46C39B5F4B}"/>
+                <a16:creationId xmlns:a16="http://schemas.microsoft.com/office/drawing/2014/main" xmlns="" id="{99B4D07D-91DC-57C7-134C-6F46C39B5F4B}"/>
               </a:ext>
             </a:extLst>
           </p:cNvPr>
@@ -258,7 +258,7 @@
           <p:cNvPr id="4" name="Дата 3">
             <a:extLst>
               <a:ext uri="{FF2B5EF4-FFF2-40B4-BE49-F238E27FC236}">
-                <a16:creationId xmlns:a16="http://schemas.microsoft.com/office/drawing/2014/main" id="{AA34FE7B-BDE2-8546-3904-6451AFC45218}"/>
+                <a16:creationId xmlns:a16="http://schemas.microsoft.com/office/drawing/2014/main" xmlns="" id="{AA34FE7B-BDE2-8546-3904-6451AFC45218}"/>
               </a:ext>
             </a:extLst>
           </p:cNvPr>
@@ -276,6 +276,7 @@
           <a:p>
             <a:fld id="{5BCAD085-E8A6-8845-BD4E-CB4CCA059FC4}" type="datetimeFigureOut">
               <a:rPr lang="en-US" smtClean="0"/>
+              <a:pPr/>
               <a:t>3/6/2026</a:t>
             </a:fld>
             <a:endParaRPr lang="en-US"/>
@@ -287,7 +288,7 @@
           <p:cNvPr id="5" name="Нижний колонтитул 4">
             <a:extLst>
               <a:ext uri="{FF2B5EF4-FFF2-40B4-BE49-F238E27FC236}">
-                <a16:creationId xmlns:a16="http://schemas.microsoft.com/office/drawing/2014/main" id="{CEA280D5-E6D8-0628-CD56-CDCA6AE30977}"/>
+                <a16:creationId xmlns:a16="http://schemas.microsoft.com/office/drawing/2014/main" xmlns="" id="{CEA280D5-E6D8-0628-CD56-CDCA6AE30977}"/>
               </a:ext>
             </a:extLst>
           </p:cNvPr>
@@ -312,7 +313,7 @@
           <p:cNvPr id="6" name="Номер слайда 5">
             <a:extLst>
               <a:ext uri="{FF2B5EF4-FFF2-40B4-BE49-F238E27FC236}">
-                <a16:creationId xmlns:a16="http://schemas.microsoft.com/office/drawing/2014/main" id="{61D12F50-DEF0-31E8-8B2D-98F602C45163}"/>
+                <a16:creationId xmlns:a16="http://schemas.microsoft.com/office/drawing/2014/main" xmlns="" id="{61D12F50-DEF0-31E8-8B2D-98F602C45163}"/>
               </a:ext>
             </a:extLst>
           </p:cNvPr>
@@ -330,6 +331,7 @@
           <a:p>
             <a:fld id="{C1FF6DA9-008F-8B48-92A6-B652298478BF}" type="slidenum">
               <a:rPr lang="en-US" smtClean="0"/>
+              <a:pPr/>
               <a:t>‹#›</a:t>
             </a:fld>
             <a:endParaRPr lang="en-US"/>
@@ -339,7 +341,7 @@
     </p:spTree>
     <p:extLst>
       <p:ext uri="{BB962C8B-B14F-4D97-AF65-F5344CB8AC3E}">
-        <p14:creationId xmlns:p14="http://schemas.microsoft.com/office/powerpoint/2010/main" val="2020691009"/>
+        <p14:creationId xmlns:p14="http://schemas.microsoft.com/office/powerpoint/2010/main" xmlns="" val="2020691009"/>
       </p:ext>
     </p:extLst>
   </p:cSld>
@@ -371,7 +373,7 @@
           <p:cNvPr id="2" name="Заголовок 1">
             <a:extLst>
               <a:ext uri="{FF2B5EF4-FFF2-40B4-BE49-F238E27FC236}">
-                <a16:creationId xmlns:a16="http://schemas.microsoft.com/office/drawing/2014/main" id="{33ACF9EB-BD83-1C51-32BB-B928369F1A4E}"/>
+                <a16:creationId xmlns:a16="http://schemas.microsoft.com/office/drawing/2014/main" xmlns="" id="{33ACF9EB-BD83-1C51-32BB-B928369F1A4E}"/>
               </a:ext>
             </a:extLst>
           </p:cNvPr>
@@ -399,7 +401,7 @@
           <p:cNvPr id="3" name="Вертикальный текст 2">
             <a:extLst>
               <a:ext uri="{FF2B5EF4-FFF2-40B4-BE49-F238E27FC236}">
-                <a16:creationId xmlns:a16="http://schemas.microsoft.com/office/drawing/2014/main" id="{D6AB9FC4-DF7D-351F-A428-0361A7B6F2D5}"/>
+                <a16:creationId xmlns:a16="http://schemas.microsoft.com/office/drawing/2014/main" xmlns="" id="{D6AB9FC4-DF7D-351F-A428-0361A7B6F2D5}"/>
               </a:ext>
             </a:extLst>
           </p:cNvPr>
@@ -456,7 +458,7 @@
           <p:cNvPr id="4" name="Дата 3">
             <a:extLst>
               <a:ext uri="{FF2B5EF4-FFF2-40B4-BE49-F238E27FC236}">
-                <a16:creationId xmlns:a16="http://schemas.microsoft.com/office/drawing/2014/main" id="{5EB58047-B1CC-5661-359F-E05D1A73D70B}"/>
+                <a16:creationId xmlns:a16="http://schemas.microsoft.com/office/drawing/2014/main" xmlns="" id="{5EB58047-B1CC-5661-359F-E05D1A73D70B}"/>
               </a:ext>
             </a:extLst>
           </p:cNvPr>
@@ -474,6 +476,7 @@
           <a:p>
             <a:fld id="{5BCAD085-E8A6-8845-BD4E-CB4CCA059FC4}" type="datetimeFigureOut">
               <a:rPr lang="en-US" smtClean="0"/>
+              <a:pPr/>
               <a:t>3/6/2026</a:t>
             </a:fld>
             <a:endParaRPr lang="en-US"/>
@@ -485,7 +488,7 @@
           <p:cNvPr id="5" name="Нижний колонтитул 4">
             <a:extLst>
               <a:ext uri="{FF2B5EF4-FFF2-40B4-BE49-F238E27FC236}">
-                <a16:creationId xmlns:a16="http://schemas.microsoft.com/office/drawing/2014/main" id="{24560108-8AE3-990A-4E27-CD289ED7C2F4}"/>
+                <a16:creationId xmlns:a16="http://schemas.microsoft.com/office/drawing/2014/main" xmlns="" id="{24560108-8AE3-990A-4E27-CD289ED7C2F4}"/>
               </a:ext>
             </a:extLst>
           </p:cNvPr>
@@ -510,7 +513,7 @@
           <p:cNvPr id="6" name="Номер слайда 5">
             <a:extLst>
               <a:ext uri="{FF2B5EF4-FFF2-40B4-BE49-F238E27FC236}">
-                <a16:creationId xmlns:a16="http://schemas.microsoft.com/office/drawing/2014/main" id="{A89DE596-5432-A2C2-E1B7-76AF4442A294}"/>
+                <a16:creationId xmlns:a16="http://schemas.microsoft.com/office/drawing/2014/main" xmlns="" id="{A89DE596-5432-A2C2-E1B7-76AF4442A294}"/>
               </a:ext>
             </a:extLst>
           </p:cNvPr>
@@ -528,6 +531,7 @@
           <a:p>
             <a:fld id="{C1FF6DA9-008F-8B48-92A6-B652298478BF}" type="slidenum">
               <a:rPr lang="en-US" smtClean="0"/>
+              <a:pPr/>
               <a:t>‹#›</a:t>
             </a:fld>
             <a:endParaRPr lang="en-US"/>
@@ -537,7 +541,7 @@
     </p:spTree>
     <p:extLst>
       <p:ext uri="{BB962C8B-B14F-4D97-AF65-F5344CB8AC3E}">
-        <p14:creationId xmlns:p14="http://schemas.microsoft.com/office/powerpoint/2010/main" val="564540927"/>
+        <p14:creationId xmlns:p14="http://schemas.microsoft.com/office/powerpoint/2010/main" xmlns="" val="564540927"/>
       </p:ext>
     </p:extLst>
   </p:cSld>
@@ -569,7 +573,7 @@
           <p:cNvPr id="2" name="Вертикальный заголовок 1">
             <a:extLst>
               <a:ext uri="{FF2B5EF4-FFF2-40B4-BE49-F238E27FC236}">
-                <a16:creationId xmlns:a16="http://schemas.microsoft.com/office/drawing/2014/main" id="{737FBFB0-E818-932A-154F-2DE85926E1D8}"/>
+                <a16:creationId xmlns:a16="http://schemas.microsoft.com/office/drawing/2014/main" xmlns="" id="{737FBFB0-E818-932A-154F-2DE85926E1D8}"/>
               </a:ext>
             </a:extLst>
           </p:cNvPr>
@@ -602,7 +606,7 @@
           <p:cNvPr id="3" name="Вертикальный текст 2">
             <a:extLst>
               <a:ext uri="{FF2B5EF4-FFF2-40B4-BE49-F238E27FC236}">
-                <a16:creationId xmlns:a16="http://schemas.microsoft.com/office/drawing/2014/main" id="{70A630CC-316D-5EBB-7357-4925066F79A7}"/>
+                <a16:creationId xmlns:a16="http://schemas.microsoft.com/office/drawing/2014/main" xmlns="" id="{70A630CC-316D-5EBB-7357-4925066F79A7}"/>
               </a:ext>
             </a:extLst>
           </p:cNvPr>
@@ -664,7 +668,7 @@
           <p:cNvPr id="4" name="Дата 3">
             <a:extLst>
               <a:ext uri="{FF2B5EF4-FFF2-40B4-BE49-F238E27FC236}">
-                <a16:creationId xmlns:a16="http://schemas.microsoft.com/office/drawing/2014/main" id="{81E5C498-2B67-81B9-2E00-80ABEE0343FB}"/>
+                <a16:creationId xmlns:a16="http://schemas.microsoft.com/office/drawing/2014/main" xmlns="" id="{81E5C498-2B67-81B9-2E00-80ABEE0343FB}"/>
               </a:ext>
             </a:extLst>
           </p:cNvPr>
@@ -682,6 +686,7 @@
           <a:p>
             <a:fld id="{5BCAD085-E8A6-8845-BD4E-CB4CCA059FC4}" type="datetimeFigureOut">
               <a:rPr lang="en-US" smtClean="0"/>
+              <a:pPr/>
               <a:t>3/6/2026</a:t>
             </a:fld>
             <a:endParaRPr lang="en-US"/>
@@ -693,7 +698,7 @@
           <p:cNvPr id="5" name="Нижний колонтитул 4">
             <a:extLst>
               <a:ext uri="{FF2B5EF4-FFF2-40B4-BE49-F238E27FC236}">
-                <a16:creationId xmlns:a16="http://schemas.microsoft.com/office/drawing/2014/main" id="{14251ABE-2BA0-F338-BDFC-F87E7E695D5F}"/>
+                <a16:creationId xmlns:a16="http://schemas.microsoft.com/office/drawing/2014/main" xmlns="" id="{14251ABE-2BA0-F338-BDFC-F87E7E695D5F}"/>
               </a:ext>
             </a:extLst>
           </p:cNvPr>
@@ -718,7 +723,7 @@
           <p:cNvPr id="6" name="Номер слайда 5">
             <a:extLst>
               <a:ext uri="{FF2B5EF4-FFF2-40B4-BE49-F238E27FC236}">
-                <a16:creationId xmlns:a16="http://schemas.microsoft.com/office/drawing/2014/main" id="{3C8E1879-37BE-8D08-F347-71735C881A48}"/>
+                <a16:creationId xmlns:a16="http://schemas.microsoft.com/office/drawing/2014/main" xmlns="" id="{3C8E1879-37BE-8D08-F347-71735C881A48}"/>
               </a:ext>
             </a:extLst>
           </p:cNvPr>
@@ -736,6 +741,7 @@
           <a:p>
             <a:fld id="{C1FF6DA9-008F-8B48-92A6-B652298478BF}" type="slidenum">
               <a:rPr lang="en-US" smtClean="0"/>
+              <a:pPr/>
               <a:t>‹#›</a:t>
             </a:fld>
             <a:endParaRPr lang="en-US"/>
@@ -745,7 +751,7 @@
     </p:spTree>
     <p:extLst>
       <p:ext uri="{BB962C8B-B14F-4D97-AF65-F5344CB8AC3E}">
-        <p14:creationId xmlns:p14="http://schemas.microsoft.com/office/powerpoint/2010/main" val="3667570253"/>
+        <p14:creationId xmlns:p14="http://schemas.microsoft.com/office/powerpoint/2010/main" xmlns="" val="3667570253"/>
       </p:ext>
     </p:extLst>
   </p:cSld>
@@ -777,7 +783,7 @@
           <p:cNvPr id="2" name="Заголовок 1">
             <a:extLst>
               <a:ext uri="{FF2B5EF4-FFF2-40B4-BE49-F238E27FC236}">
-                <a16:creationId xmlns:a16="http://schemas.microsoft.com/office/drawing/2014/main" id="{6683A4E4-CA90-364A-4BB6-5208DA8E2855}"/>
+                <a16:creationId xmlns:a16="http://schemas.microsoft.com/office/drawing/2014/main" xmlns="" id="{6683A4E4-CA90-364A-4BB6-5208DA8E2855}"/>
               </a:ext>
             </a:extLst>
           </p:cNvPr>
@@ -805,7 +811,7 @@
           <p:cNvPr id="3" name="Объект 2">
             <a:extLst>
               <a:ext uri="{FF2B5EF4-FFF2-40B4-BE49-F238E27FC236}">
-                <a16:creationId xmlns:a16="http://schemas.microsoft.com/office/drawing/2014/main" id="{BE9BFEBF-4C2A-0564-24B3-20142C19E54B}"/>
+                <a16:creationId xmlns:a16="http://schemas.microsoft.com/office/drawing/2014/main" xmlns="" id="{BE9BFEBF-4C2A-0564-24B3-20142C19E54B}"/>
               </a:ext>
             </a:extLst>
           </p:cNvPr>
@@ -862,7 +868,7 @@
           <p:cNvPr id="4" name="Дата 3">
             <a:extLst>
               <a:ext uri="{FF2B5EF4-FFF2-40B4-BE49-F238E27FC236}">
-                <a16:creationId xmlns:a16="http://schemas.microsoft.com/office/drawing/2014/main" id="{0377AB30-3559-4882-2169-5857D6C60C5E}"/>
+                <a16:creationId xmlns:a16="http://schemas.microsoft.com/office/drawing/2014/main" xmlns="" id="{0377AB30-3559-4882-2169-5857D6C60C5E}"/>
               </a:ext>
             </a:extLst>
           </p:cNvPr>
@@ -880,6 +886,7 @@
           <a:p>
             <a:fld id="{5BCAD085-E8A6-8845-BD4E-CB4CCA059FC4}" type="datetimeFigureOut">
               <a:rPr lang="en-US" smtClean="0"/>
+              <a:pPr/>
               <a:t>3/6/2026</a:t>
             </a:fld>
             <a:endParaRPr lang="en-US"/>
@@ -891,7 +898,7 @@
           <p:cNvPr id="5" name="Нижний колонтитул 4">
             <a:extLst>
               <a:ext uri="{FF2B5EF4-FFF2-40B4-BE49-F238E27FC236}">
-                <a16:creationId xmlns:a16="http://schemas.microsoft.com/office/drawing/2014/main" id="{AC1D0A7B-E5F5-8CDB-D58A-A61991B561A2}"/>
+                <a16:creationId xmlns:a16="http://schemas.microsoft.com/office/drawing/2014/main" xmlns="" id="{AC1D0A7B-E5F5-8CDB-D58A-A61991B561A2}"/>
               </a:ext>
             </a:extLst>
           </p:cNvPr>
@@ -916,7 +923,7 @@
           <p:cNvPr id="6" name="Номер слайда 5">
             <a:extLst>
               <a:ext uri="{FF2B5EF4-FFF2-40B4-BE49-F238E27FC236}">
-                <a16:creationId xmlns:a16="http://schemas.microsoft.com/office/drawing/2014/main" id="{F86FD243-75DC-07E9-1CE2-848E325BF07E}"/>
+                <a16:creationId xmlns:a16="http://schemas.microsoft.com/office/drawing/2014/main" xmlns="" id="{F86FD243-75DC-07E9-1CE2-848E325BF07E}"/>
               </a:ext>
             </a:extLst>
           </p:cNvPr>
@@ -934,6 +941,7 @@
           <a:p>
             <a:fld id="{C1FF6DA9-008F-8B48-92A6-B652298478BF}" type="slidenum">
               <a:rPr lang="en-US" smtClean="0"/>
+              <a:pPr/>
               <a:t>‹#›</a:t>
             </a:fld>
             <a:endParaRPr lang="en-US"/>
@@ -943,7 +951,7 @@
     </p:spTree>
     <p:extLst>
       <p:ext uri="{BB962C8B-B14F-4D97-AF65-F5344CB8AC3E}">
-        <p14:creationId xmlns:p14="http://schemas.microsoft.com/office/powerpoint/2010/main" val="695195218"/>
+        <p14:creationId xmlns:p14="http://schemas.microsoft.com/office/powerpoint/2010/main" xmlns="" val="695195218"/>
       </p:ext>
     </p:extLst>
   </p:cSld>
@@ -975,7 +983,7 @@
           <p:cNvPr id="2" name="Заголовок 1">
             <a:extLst>
               <a:ext uri="{FF2B5EF4-FFF2-40B4-BE49-F238E27FC236}">
-                <a16:creationId xmlns:a16="http://schemas.microsoft.com/office/drawing/2014/main" id="{04F45953-6A7C-FCCD-0A12-BEEBB84E4128}"/>
+                <a16:creationId xmlns:a16="http://schemas.microsoft.com/office/drawing/2014/main" xmlns="" id="{04F45953-6A7C-FCCD-0A12-BEEBB84E4128}"/>
               </a:ext>
             </a:extLst>
           </p:cNvPr>
@@ -1012,7 +1020,7 @@
           <p:cNvPr id="3" name="Текст 2">
             <a:extLst>
               <a:ext uri="{FF2B5EF4-FFF2-40B4-BE49-F238E27FC236}">
-                <a16:creationId xmlns:a16="http://schemas.microsoft.com/office/drawing/2014/main" id="{2D94183C-E1BB-F09D-7DD2-3CAA868ABF31}"/>
+                <a16:creationId xmlns:a16="http://schemas.microsoft.com/office/drawing/2014/main" xmlns="" id="{2D94183C-E1BB-F09D-7DD2-3CAA868ABF31}"/>
               </a:ext>
             </a:extLst>
           </p:cNvPr>
@@ -1137,7 +1145,7 @@
           <p:cNvPr id="4" name="Дата 3">
             <a:extLst>
               <a:ext uri="{FF2B5EF4-FFF2-40B4-BE49-F238E27FC236}">
-                <a16:creationId xmlns:a16="http://schemas.microsoft.com/office/drawing/2014/main" id="{502ECE13-F5A6-7477-13C6-45235340962D}"/>
+                <a16:creationId xmlns:a16="http://schemas.microsoft.com/office/drawing/2014/main" xmlns="" id="{502ECE13-F5A6-7477-13C6-45235340962D}"/>
               </a:ext>
             </a:extLst>
           </p:cNvPr>
@@ -1155,6 +1163,7 @@
           <a:p>
             <a:fld id="{5BCAD085-E8A6-8845-BD4E-CB4CCA059FC4}" type="datetimeFigureOut">
               <a:rPr lang="en-US" smtClean="0"/>
+              <a:pPr/>
               <a:t>3/6/2026</a:t>
             </a:fld>
             <a:endParaRPr lang="en-US"/>
@@ -1166,7 +1175,7 @@
           <p:cNvPr id="5" name="Нижний колонтитул 4">
             <a:extLst>
               <a:ext uri="{FF2B5EF4-FFF2-40B4-BE49-F238E27FC236}">
-                <a16:creationId xmlns:a16="http://schemas.microsoft.com/office/drawing/2014/main" id="{4AFEA5AC-9C23-FF72-65C4-68DBD13B9F97}"/>
+                <a16:creationId xmlns:a16="http://schemas.microsoft.com/office/drawing/2014/main" xmlns="" id="{4AFEA5AC-9C23-FF72-65C4-68DBD13B9F97}"/>
               </a:ext>
             </a:extLst>
           </p:cNvPr>
@@ -1191,7 +1200,7 @@
           <p:cNvPr id="6" name="Номер слайда 5">
             <a:extLst>
               <a:ext uri="{FF2B5EF4-FFF2-40B4-BE49-F238E27FC236}">
-                <a16:creationId xmlns:a16="http://schemas.microsoft.com/office/drawing/2014/main" id="{F49624F9-71A2-C13D-CE1C-E7AF8739C706}"/>
+                <a16:creationId xmlns:a16="http://schemas.microsoft.com/office/drawing/2014/main" xmlns="" id="{F49624F9-71A2-C13D-CE1C-E7AF8739C706}"/>
               </a:ext>
             </a:extLst>
           </p:cNvPr>
@@ -1209,6 +1218,7 @@
           <a:p>
             <a:fld id="{C1FF6DA9-008F-8B48-92A6-B652298478BF}" type="slidenum">
               <a:rPr lang="en-US" smtClean="0"/>
+              <a:pPr/>
               <a:t>‹#›</a:t>
             </a:fld>
             <a:endParaRPr lang="en-US"/>
@@ -1218,7 +1228,7 @@
     </p:spTree>
     <p:extLst>
       <p:ext uri="{BB962C8B-B14F-4D97-AF65-F5344CB8AC3E}">
-        <p14:creationId xmlns:p14="http://schemas.microsoft.com/office/powerpoint/2010/main" val="4036094805"/>
+        <p14:creationId xmlns:p14="http://schemas.microsoft.com/office/powerpoint/2010/main" xmlns="" val="4036094805"/>
       </p:ext>
     </p:extLst>
   </p:cSld>
@@ -1250,7 +1260,7 @@
           <p:cNvPr id="2" name="Заголовок 1">
             <a:extLst>
               <a:ext uri="{FF2B5EF4-FFF2-40B4-BE49-F238E27FC236}">
-                <a16:creationId xmlns:a16="http://schemas.microsoft.com/office/drawing/2014/main" id="{1F89D9F4-4008-B147-4D7A-4B0E6AD5D567}"/>
+                <a16:creationId xmlns:a16="http://schemas.microsoft.com/office/drawing/2014/main" xmlns="" id="{1F89D9F4-4008-B147-4D7A-4B0E6AD5D567}"/>
               </a:ext>
             </a:extLst>
           </p:cNvPr>
@@ -1278,7 +1288,7 @@
           <p:cNvPr id="3" name="Объект 2">
             <a:extLst>
               <a:ext uri="{FF2B5EF4-FFF2-40B4-BE49-F238E27FC236}">
-                <a16:creationId xmlns:a16="http://schemas.microsoft.com/office/drawing/2014/main" id="{C8D1DC5C-889B-D428-FD01-ACC0529F8393}"/>
+                <a16:creationId xmlns:a16="http://schemas.microsoft.com/office/drawing/2014/main" xmlns="" id="{C8D1DC5C-889B-D428-FD01-ACC0529F8393}"/>
               </a:ext>
             </a:extLst>
           </p:cNvPr>
@@ -1340,7 +1350,7 @@
           <p:cNvPr id="4" name="Объект 3">
             <a:extLst>
               <a:ext uri="{FF2B5EF4-FFF2-40B4-BE49-F238E27FC236}">
-                <a16:creationId xmlns:a16="http://schemas.microsoft.com/office/drawing/2014/main" id="{1390F7F8-112C-F4CD-765F-69C9EDB0C7A7}"/>
+                <a16:creationId xmlns:a16="http://schemas.microsoft.com/office/drawing/2014/main" xmlns="" id="{1390F7F8-112C-F4CD-765F-69C9EDB0C7A7}"/>
               </a:ext>
             </a:extLst>
           </p:cNvPr>
@@ -1402,7 +1412,7 @@
           <p:cNvPr id="5" name="Дата 4">
             <a:extLst>
               <a:ext uri="{FF2B5EF4-FFF2-40B4-BE49-F238E27FC236}">
-                <a16:creationId xmlns:a16="http://schemas.microsoft.com/office/drawing/2014/main" id="{8BCBCF69-951C-73BA-4B67-72504A583FD1}"/>
+                <a16:creationId xmlns:a16="http://schemas.microsoft.com/office/drawing/2014/main" xmlns="" id="{8BCBCF69-951C-73BA-4B67-72504A583FD1}"/>
               </a:ext>
             </a:extLst>
           </p:cNvPr>
@@ -1420,6 +1430,7 @@
           <a:p>
             <a:fld id="{5BCAD085-E8A6-8845-BD4E-CB4CCA059FC4}" type="datetimeFigureOut">
               <a:rPr lang="en-US" smtClean="0"/>
+              <a:pPr/>
               <a:t>3/6/2026</a:t>
             </a:fld>
             <a:endParaRPr lang="en-US"/>
@@ -1431,7 +1442,7 @@
           <p:cNvPr id="6" name="Нижний колонтитул 5">
             <a:extLst>
               <a:ext uri="{FF2B5EF4-FFF2-40B4-BE49-F238E27FC236}">
-                <a16:creationId xmlns:a16="http://schemas.microsoft.com/office/drawing/2014/main" id="{D38FFA63-489A-CA99-6B1C-F5A6CDFB82E1}"/>
+                <a16:creationId xmlns:a16="http://schemas.microsoft.com/office/drawing/2014/main" xmlns="" id="{D38FFA63-489A-CA99-6B1C-F5A6CDFB82E1}"/>
               </a:ext>
             </a:extLst>
           </p:cNvPr>
@@ -1456,7 +1467,7 @@
           <p:cNvPr id="7" name="Номер слайда 6">
             <a:extLst>
               <a:ext uri="{FF2B5EF4-FFF2-40B4-BE49-F238E27FC236}">
-                <a16:creationId xmlns:a16="http://schemas.microsoft.com/office/drawing/2014/main" id="{FDEACA40-64AD-F532-EA1A-2219C8E2223A}"/>
+                <a16:creationId xmlns:a16="http://schemas.microsoft.com/office/drawing/2014/main" xmlns="" id="{FDEACA40-64AD-F532-EA1A-2219C8E2223A}"/>
               </a:ext>
             </a:extLst>
           </p:cNvPr>
@@ -1474,6 +1485,7 @@
           <a:p>
             <a:fld id="{C1FF6DA9-008F-8B48-92A6-B652298478BF}" type="slidenum">
               <a:rPr lang="en-US" smtClean="0"/>
+              <a:pPr/>
               <a:t>‹#›</a:t>
             </a:fld>
             <a:endParaRPr lang="en-US"/>
@@ -1483,7 +1495,7 @@
     </p:spTree>
     <p:extLst>
       <p:ext uri="{BB962C8B-B14F-4D97-AF65-F5344CB8AC3E}">
-        <p14:creationId xmlns:p14="http://schemas.microsoft.com/office/powerpoint/2010/main" val="1107886790"/>
+        <p14:creationId xmlns:p14="http://schemas.microsoft.com/office/powerpoint/2010/main" xmlns="" val="1107886790"/>
       </p:ext>
     </p:extLst>
   </p:cSld>
@@ -1515,7 +1527,7 @@
           <p:cNvPr id="2" name="Заголовок 1">
             <a:extLst>
               <a:ext uri="{FF2B5EF4-FFF2-40B4-BE49-F238E27FC236}">
-                <a16:creationId xmlns:a16="http://schemas.microsoft.com/office/drawing/2014/main" id="{439D5CBC-3F2F-0701-8CEB-546771B6BDCB}"/>
+                <a16:creationId xmlns:a16="http://schemas.microsoft.com/office/drawing/2014/main" xmlns="" id="{439D5CBC-3F2F-0701-8CEB-546771B6BDCB}"/>
               </a:ext>
             </a:extLst>
           </p:cNvPr>
@@ -1548,7 +1560,7 @@
           <p:cNvPr id="3" name="Текст 2">
             <a:extLst>
               <a:ext uri="{FF2B5EF4-FFF2-40B4-BE49-F238E27FC236}">
-                <a16:creationId xmlns:a16="http://schemas.microsoft.com/office/drawing/2014/main" id="{62D8B7F8-46E8-212A-1E79-B5CC3BC14BA9}"/>
+                <a16:creationId xmlns:a16="http://schemas.microsoft.com/office/drawing/2014/main" xmlns="" id="{62D8B7F8-46E8-212A-1E79-B5CC3BC14BA9}"/>
               </a:ext>
             </a:extLst>
           </p:cNvPr>
@@ -1619,7 +1631,7 @@
           <p:cNvPr id="4" name="Объект 3">
             <a:extLst>
               <a:ext uri="{FF2B5EF4-FFF2-40B4-BE49-F238E27FC236}">
-                <a16:creationId xmlns:a16="http://schemas.microsoft.com/office/drawing/2014/main" id="{A41CBA74-435A-C8B3-FF30-BD3F1EC55B2C}"/>
+                <a16:creationId xmlns:a16="http://schemas.microsoft.com/office/drawing/2014/main" xmlns="" id="{A41CBA74-435A-C8B3-FF30-BD3F1EC55B2C}"/>
               </a:ext>
             </a:extLst>
           </p:cNvPr>
@@ -1681,7 +1693,7 @@
           <p:cNvPr id="5" name="Текст 4">
             <a:extLst>
               <a:ext uri="{FF2B5EF4-FFF2-40B4-BE49-F238E27FC236}">
-                <a16:creationId xmlns:a16="http://schemas.microsoft.com/office/drawing/2014/main" id="{5357987E-A58B-61A1-59BF-CA7997A142F4}"/>
+                <a16:creationId xmlns:a16="http://schemas.microsoft.com/office/drawing/2014/main" xmlns="" id="{5357987E-A58B-61A1-59BF-CA7997A142F4}"/>
               </a:ext>
             </a:extLst>
           </p:cNvPr>
@@ -1752,7 +1764,7 @@
           <p:cNvPr id="6" name="Объект 5">
             <a:extLst>
               <a:ext uri="{FF2B5EF4-FFF2-40B4-BE49-F238E27FC236}">
-                <a16:creationId xmlns:a16="http://schemas.microsoft.com/office/drawing/2014/main" id="{CD84D0F2-5CB1-8EF9-A8A9-2987D2D22C9F}"/>
+                <a16:creationId xmlns:a16="http://schemas.microsoft.com/office/drawing/2014/main" xmlns="" id="{CD84D0F2-5CB1-8EF9-A8A9-2987D2D22C9F}"/>
               </a:ext>
             </a:extLst>
           </p:cNvPr>
@@ -1814,7 +1826,7 @@
           <p:cNvPr id="7" name="Дата 6">
             <a:extLst>
               <a:ext uri="{FF2B5EF4-FFF2-40B4-BE49-F238E27FC236}">
-                <a16:creationId xmlns:a16="http://schemas.microsoft.com/office/drawing/2014/main" id="{3EFBA658-DDC8-3012-9BA9-39B26F128255}"/>
+                <a16:creationId xmlns:a16="http://schemas.microsoft.com/office/drawing/2014/main" xmlns="" id="{3EFBA658-DDC8-3012-9BA9-39B26F128255}"/>
               </a:ext>
             </a:extLst>
           </p:cNvPr>
@@ -1832,6 +1844,7 @@
           <a:p>
             <a:fld id="{5BCAD085-E8A6-8845-BD4E-CB4CCA059FC4}" type="datetimeFigureOut">
               <a:rPr lang="en-US" smtClean="0"/>
+              <a:pPr/>
               <a:t>3/6/2026</a:t>
             </a:fld>
             <a:endParaRPr lang="en-US"/>
@@ -1843,7 +1856,7 @@
           <p:cNvPr id="8" name="Нижний колонтитул 7">
             <a:extLst>
               <a:ext uri="{FF2B5EF4-FFF2-40B4-BE49-F238E27FC236}">
-                <a16:creationId xmlns:a16="http://schemas.microsoft.com/office/drawing/2014/main" id="{8DE23EB8-4160-2234-6AA5-812B4587AC3E}"/>
+                <a16:creationId xmlns:a16="http://schemas.microsoft.com/office/drawing/2014/main" xmlns="" id="{8DE23EB8-4160-2234-6AA5-812B4587AC3E}"/>
               </a:ext>
             </a:extLst>
           </p:cNvPr>
@@ -1868,7 +1881,7 @@
           <p:cNvPr id="9" name="Номер слайда 8">
             <a:extLst>
               <a:ext uri="{FF2B5EF4-FFF2-40B4-BE49-F238E27FC236}">
-                <a16:creationId xmlns:a16="http://schemas.microsoft.com/office/drawing/2014/main" id="{450466F6-943C-F931-F41A-E55B02681A18}"/>
+                <a16:creationId xmlns:a16="http://schemas.microsoft.com/office/drawing/2014/main" xmlns="" id="{450466F6-943C-F931-F41A-E55B02681A18}"/>
               </a:ext>
             </a:extLst>
           </p:cNvPr>
@@ -1886,6 +1899,7 @@
           <a:p>
             <a:fld id="{C1FF6DA9-008F-8B48-92A6-B652298478BF}" type="slidenum">
               <a:rPr lang="en-US" smtClean="0"/>
+              <a:pPr/>
               <a:t>‹#›</a:t>
             </a:fld>
             <a:endParaRPr lang="en-US"/>
@@ -1895,7 +1909,7 @@
     </p:spTree>
     <p:extLst>
       <p:ext uri="{BB962C8B-B14F-4D97-AF65-F5344CB8AC3E}">
-        <p14:creationId xmlns:p14="http://schemas.microsoft.com/office/powerpoint/2010/main" val="1386748382"/>
+        <p14:creationId xmlns:p14="http://schemas.microsoft.com/office/powerpoint/2010/main" xmlns="" val="1386748382"/>
       </p:ext>
     </p:extLst>
   </p:cSld>
@@ -1927,7 +1941,7 @@
           <p:cNvPr id="2" name="Заголовок 1">
             <a:extLst>
               <a:ext uri="{FF2B5EF4-FFF2-40B4-BE49-F238E27FC236}">
-                <a16:creationId xmlns:a16="http://schemas.microsoft.com/office/drawing/2014/main" id="{5E033536-6953-D07F-0FEE-DE8E030B30ED}"/>
+                <a16:creationId xmlns:a16="http://schemas.microsoft.com/office/drawing/2014/main" xmlns="" id="{5E033536-6953-D07F-0FEE-DE8E030B30ED}"/>
               </a:ext>
             </a:extLst>
           </p:cNvPr>
@@ -1955,7 +1969,7 @@
           <p:cNvPr id="3" name="Дата 2">
             <a:extLst>
               <a:ext uri="{FF2B5EF4-FFF2-40B4-BE49-F238E27FC236}">
-                <a16:creationId xmlns:a16="http://schemas.microsoft.com/office/drawing/2014/main" id="{79817195-52A9-13B2-3404-0FED53A44E09}"/>
+                <a16:creationId xmlns:a16="http://schemas.microsoft.com/office/drawing/2014/main" xmlns="" id="{79817195-52A9-13B2-3404-0FED53A44E09}"/>
               </a:ext>
             </a:extLst>
           </p:cNvPr>
@@ -1973,6 +1987,7 @@
           <a:p>
             <a:fld id="{5BCAD085-E8A6-8845-BD4E-CB4CCA059FC4}" type="datetimeFigureOut">
               <a:rPr lang="en-US" smtClean="0"/>
+              <a:pPr/>
               <a:t>3/6/2026</a:t>
             </a:fld>
             <a:endParaRPr lang="en-US"/>
@@ -1984,7 +1999,7 @@
           <p:cNvPr id="4" name="Нижний колонтитул 3">
             <a:extLst>
               <a:ext uri="{FF2B5EF4-FFF2-40B4-BE49-F238E27FC236}">
-                <a16:creationId xmlns:a16="http://schemas.microsoft.com/office/drawing/2014/main" id="{009737FD-DD2C-609E-E0D8-B88D1527CF8D}"/>
+                <a16:creationId xmlns:a16="http://schemas.microsoft.com/office/drawing/2014/main" xmlns="" id="{009737FD-DD2C-609E-E0D8-B88D1527CF8D}"/>
               </a:ext>
             </a:extLst>
           </p:cNvPr>
@@ -2009,7 +2024,7 @@
           <p:cNvPr id="5" name="Номер слайда 4">
             <a:extLst>
               <a:ext uri="{FF2B5EF4-FFF2-40B4-BE49-F238E27FC236}">
-                <a16:creationId xmlns:a16="http://schemas.microsoft.com/office/drawing/2014/main" id="{065A4BFC-50D5-D20C-B96B-5BEAD699997F}"/>
+                <a16:creationId xmlns:a16="http://schemas.microsoft.com/office/drawing/2014/main" xmlns="" id="{065A4BFC-50D5-D20C-B96B-5BEAD699997F}"/>
               </a:ext>
             </a:extLst>
           </p:cNvPr>
@@ -2027,6 +2042,7 @@
           <a:p>
             <a:fld id="{C1FF6DA9-008F-8B48-92A6-B652298478BF}" type="slidenum">
               <a:rPr lang="en-US" smtClean="0"/>
+              <a:pPr/>
               <a:t>‹#›</a:t>
             </a:fld>
             <a:endParaRPr lang="en-US"/>
@@ -2036,7 +2052,7 @@
     </p:spTree>
     <p:extLst>
       <p:ext uri="{BB962C8B-B14F-4D97-AF65-F5344CB8AC3E}">
-        <p14:creationId xmlns:p14="http://schemas.microsoft.com/office/powerpoint/2010/main" val="2521028645"/>
+        <p14:creationId xmlns:p14="http://schemas.microsoft.com/office/powerpoint/2010/main" xmlns="" val="2521028645"/>
       </p:ext>
     </p:extLst>
   </p:cSld>
@@ -2068,7 +2084,7 @@
           <p:cNvPr id="2" name="Дата 1">
             <a:extLst>
               <a:ext uri="{FF2B5EF4-FFF2-40B4-BE49-F238E27FC236}">
-                <a16:creationId xmlns:a16="http://schemas.microsoft.com/office/drawing/2014/main" id="{F05B1D31-83B9-C56C-F32C-BDF96CC2C9F0}"/>
+                <a16:creationId xmlns:a16="http://schemas.microsoft.com/office/drawing/2014/main" xmlns="" id="{F05B1D31-83B9-C56C-F32C-BDF96CC2C9F0}"/>
               </a:ext>
             </a:extLst>
           </p:cNvPr>
@@ -2086,6 +2102,7 @@
           <a:p>
             <a:fld id="{5BCAD085-E8A6-8845-BD4E-CB4CCA059FC4}" type="datetimeFigureOut">
               <a:rPr lang="en-US" smtClean="0"/>
+              <a:pPr/>
               <a:t>3/6/2026</a:t>
             </a:fld>
             <a:endParaRPr lang="en-US"/>
@@ -2097,7 +2114,7 @@
           <p:cNvPr id="3" name="Нижний колонтитул 2">
             <a:extLst>
               <a:ext uri="{FF2B5EF4-FFF2-40B4-BE49-F238E27FC236}">
-                <a16:creationId xmlns:a16="http://schemas.microsoft.com/office/drawing/2014/main" id="{52673ADA-A506-7FA3-EC29-8F931A4826A4}"/>
+                <a16:creationId xmlns:a16="http://schemas.microsoft.com/office/drawing/2014/main" xmlns="" id="{52673ADA-A506-7FA3-EC29-8F931A4826A4}"/>
               </a:ext>
             </a:extLst>
           </p:cNvPr>
@@ -2122,7 +2139,7 @@
           <p:cNvPr id="4" name="Номер слайда 3">
             <a:extLst>
               <a:ext uri="{FF2B5EF4-FFF2-40B4-BE49-F238E27FC236}">
-                <a16:creationId xmlns:a16="http://schemas.microsoft.com/office/drawing/2014/main" id="{7D6771EF-0B03-B812-50DB-951E4827345C}"/>
+                <a16:creationId xmlns:a16="http://schemas.microsoft.com/office/drawing/2014/main" xmlns="" id="{7D6771EF-0B03-B812-50DB-951E4827345C}"/>
               </a:ext>
             </a:extLst>
           </p:cNvPr>
@@ -2140,6 +2157,7 @@
           <a:p>
             <a:fld id="{C1FF6DA9-008F-8B48-92A6-B652298478BF}" type="slidenum">
               <a:rPr lang="en-US" smtClean="0"/>
+              <a:pPr/>
               <a:t>‹#›</a:t>
             </a:fld>
             <a:endParaRPr lang="en-US"/>
@@ -2149,7 +2167,7 @@
     </p:spTree>
     <p:extLst>
       <p:ext uri="{BB962C8B-B14F-4D97-AF65-F5344CB8AC3E}">
-        <p14:creationId xmlns:p14="http://schemas.microsoft.com/office/powerpoint/2010/main" val="4280687580"/>
+        <p14:creationId xmlns:p14="http://schemas.microsoft.com/office/powerpoint/2010/main" xmlns="" val="4280687580"/>
       </p:ext>
     </p:extLst>
   </p:cSld>
@@ -2181,7 +2199,7 @@
           <p:cNvPr id="2" name="Заголовок 1">
             <a:extLst>
               <a:ext uri="{FF2B5EF4-FFF2-40B4-BE49-F238E27FC236}">
-                <a16:creationId xmlns:a16="http://schemas.microsoft.com/office/drawing/2014/main" id="{DA02C7F5-87A9-E619-9FC7-5FFB40853142}"/>
+                <a16:creationId xmlns:a16="http://schemas.microsoft.com/office/drawing/2014/main" xmlns="" id="{DA02C7F5-87A9-E619-9FC7-5FFB40853142}"/>
               </a:ext>
             </a:extLst>
           </p:cNvPr>
@@ -2218,7 +2236,7 @@
           <p:cNvPr id="3" name="Объект 2">
             <a:extLst>
               <a:ext uri="{FF2B5EF4-FFF2-40B4-BE49-F238E27FC236}">
-                <a16:creationId xmlns:a16="http://schemas.microsoft.com/office/drawing/2014/main" id="{A5834C00-B052-CAF6-6D6B-17CB6B8577FB}"/>
+                <a16:creationId xmlns:a16="http://schemas.microsoft.com/office/drawing/2014/main" xmlns="" id="{A5834C00-B052-CAF6-6D6B-17CB6B8577FB}"/>
               </a:ext>
             </a:extLst>
           </p:cNvPr>
@@ -2308,7 +2326,7 @@
           <p:cNvPr id="4" name="Текст 3">
             <a:extLst>
               <a:ext uri="{FF2B5EF4-FFF2-40B4-BE49-F238E27FC236}">
-                <a16:creationId xmlns:a16="http://schemas.microsoft.com/office/drawing/2014/main" id="{18520B14-6DCC-1583-314A-9ADD601F4CC5}"/>
+                <a16:creationId xmlns:a16="http://schemas.microsoft.com/office/drawing/2014/main" xmlns="" id="{18520B14-6DCC-1583-314A-9ADD601F4CC5}"/>
               </a:ext>
             </a:extLst>
           </p:cNvPr>
@@ -2379,7 +2397,7 @@
           <p:cNvPr id="5" name="Дата 4">
             <a:extLst>
               <a:ext uri="{FF2B5EF4-FFF2-40B4-BE49-F238E27FC236}">
-                <a16:creationId xmlns:a16="http://schemas.microsoft.com/office/drawing/2014/main" id="{CF90D1AA-35D7-A017-0CA3-3983EFA7543E}"/>
+                <a16:creationId xmlns:a16="http://schemas.microsoft.com/office/drawing/2014/main" xmlns="" id="{CF90D1AA-35D7-A017-0CA3-3983EFA7543E}"/>
               </a:ext>
             </a:extLst>
           </p:cNvPr>
@@ -2397,6 +2415,7 @@
           <a:p>
             <a:fld id="{5BCAD085-E8A6-8845-BD4E-CB4CCA059FC4}" type="datetimeFigureOut">
               <a:rPr lang="en-US" smtClean="0"/>
+              <a:pPr/>
               <a:t>3/6/2026</a:t>
             </a:fld>
             <a:endParaRPr lang="en-US"/>
@@ -2408,7 +2427,7 @@
           <p:cNvPr id="6" name="Нижний колонтитул 5">
             <a:extLst>
               <a:ext uri="{FF2B5EF4-FFF2-40B4-BE49-F238E27FC236}">
-                <a16:creationId xmlns:a16="http://schemas.microsoft.com/office/drawing/2014/main" id="{0F9B78CA-6485-A5E9-ACD6-CAB36735DB34}"/>
+                <a16:creationId xmlns:a16="http://schemas.microsoft.com/office/drawing/2014/main" xmlns="" id="{0F9B78CA-6485-A5E9-ACD6-CAB36735DB34}"/>
               </a:ext>
             </a:extLst>
           </p:cNvPr>
@@ -2433,7 +2452,7 @@
           <p:cNvPr id="7" name="Номер слайда 6">
             <a:extLst>
               <a:ext uri="{FF2B5EF4-FFF2-40B4-BE49-F238E27FC236}">
-                <a16:creationId xmlns:a16="http://schemas.microsoft.com/office/drawing/2014/main" id="{058D6864-D468-3CB3-D466-239A8561CE25}"/>
+                <a16:creationId xmlns:a16="http://schemas.microsoft.com/office/drawing/2014/main" xmlns="" id="{058D6864-D468-3CB3-D466-239A8561CE25}"/>
               </a:ext>
             </a:extLst>
           </p:cNvPr>
@@ -2451,6 +2470,7 @@
           <a:p>
             <a:fld id="{C1FF6DA9-008F-8B48-92A6-B652298478BF}" type="slidenum">
               <a:rPr lang="en-US" smtClean="0"/>
+              <a:pPr/>
               <a:t>‹#›</a:t>
             </a:fld>
             <a:endParaRPr lang="en-US"/>
@@ -2460,7 +2480,7 @@
     </p:spTree>
     <p:extLst>
       <p:ext uri="{BB962C8B-B14F-4D97-AF65-F5344CB8AC3E}">
-        <p14:creationId xmlns:p14="http://schemas.microsoft.com/office/powerpoint/2010/main" val="479485069"/>
+        <p14:creationId xmlns:p14="http://schemas.microsoft.com/office/powerpoint/2010/main" xmlns="" val="479485069"/>
       </p:ext>
     </p:extLst>
   </p:cSld>
@@ -2492,7 +2512,7 @@
           <p:cNvPr id="2" name="Заголовок 1">
             <a:extLst>
               <a:ext uri="{FF2B5EF4-FFF2-40B4-BE49-F238E27FC236}">
-                <a16:creationId xmlns:a16="http://schemas.microsoft.com/office/drawing/2014/main" id="{E853B9CF-9E20-E1D1-B7C5-CE071C41EE37}"/>
+                <a16:creationId xmlns:a16="http://schemas.microsoft.com/office/drawing/2014/main" xmlns="" id="{E853B9CF-9E20-E1D1-B7C5-CE071C41EE37}"/>
               </a:ext>
             </a:extLst>
           </p:cNvPr>
@@ -2529,7 +2549,7 @@
           <p:cNvPr id="3" name="Рисунок 2">
             <a:extLst>
               <a:ext uri="{FF2B5EF4-FFF2-40B4-BE49-F238E27FC236}">
-                <a16:creationId xmlns:a16="http://schemas.microsoft.com/office/drawing/2014/main" id="{22B1711B-D9AD-8460-0C79-2C25C200300F}"/>
+                <a16:creationId xmlns:a16="http://schemas.microsoft.com/office/drawing/2014/main" xmlns="" id="{22B1711B-D9AD-8460-0C79-2C25C200300F}"/>
               </a:ext>
             </a:extLst>
           </p:cNvPr>
@@ -2596,7 +2616,7 @@
           <p:cNvPr id="4" name="Текст 3">
             <a:extLst>
               <a:ext uri="{FF2B5EF4-FFF2-40B4-BE49-F238E27FC236}">
-                <a16:creationId xmlns:a16="http://schemas.microsoft.com/office/drawing/2014/main" id="{B103277B-A7ED-343C-E24A-2E760E4D3176}"/>
+                <a16:creationId xmlns:a16="http://schemas.microsoft.com/office/drawing/2014/main" xmlns="" id="{B103277B-A7ED-343C-E24A-2E760E4D3176}"/>
               </a:ext>
             </a:extLst>
           </p:cNvPr>
@@ -2667,7 +2687,7 @@
           <p:cNvPr id="5" name="Дата 4">
             <a:extLst>
               <a:ext uri="{FF2B5EF4-FFF2-40B4-BE49-F238E27FC236}">
-                <a16:creationId xmlns:a16="http://schemas.microsoft.com/office/drawing/2014/main" id="{E1A9D447-55AA-68BA-007C-BA051F6B7218}"/>
+                <a16:creationId xmlns:a16="http://schemas.microsoft.com/office/drawing/2014/main" xmlns="" id="{E1A9D447-55AA-68BA-007C-BA051F6B7218}"/>
               </a:ext>
             </a:extLst>
           </p:cNvPr>
@@ -2685,6 +2705,7 @@
           <a:p>
             <a:fld id="{5BCAD085-E8A6-8845-BD4E-CB4CCA059FC4}" type="datetimeFigureOut">
               <a:rPr lang="en-US" smtClean="0"/>
+              <a:pPr/>
               <a:t>3/6/2026</a:t>
             </a:fld>
             <a:endParaRPr lang="en-US"/>
@@ -2696,7 +2717,7 @@
           <p:cNvPr id="6" name="Нижний колонтитул 5">
             <a:extLst>
               <a:ext uri="{FF2B5EF4-FFF2-40B4-BE49-F238E27FC236}">
-                <a16:creationId xmlns:a16="http://schemas.microsoft.com/office/drawing/2014/main" id="{1D5FCDE8-C70D-AB94-BE7D-9881DE436665}"/>
+                <a16:creationId xmlns:a16="http://schemas.microsoft.com/office/drawing/2014/main" xmlns="" id="{1D5FCDE8-C70D-AB94-BE7D-9881DE436665}"/>
               </a:ext>
             </a:extLst>
           </p:cNvPr>
@@ -2721,7 +2742,7 @@
           <p:cNvPr id="7" name="Номер слайда 6">
             <a:extLst>
               <a:ext uri="{FF2B5EF4-FFF2-40B4-BE49-F238E27FC236}">
-                <a16:creationId xmlns:a16="http://schemas.microsoft.com/office/drawing/2014/main" id="{CF84D9E8-2AD2-3146-A00D-C0E08C5D1D34}"/>
+                <a16:creationId xmlns:a16="http://schemas.microsoft.com/office/drawing/2014/main" xmlns="" id="{CF84D9E8-2AD2-3146-A00D-C0E08C5D1D34}"/>
               </a:ext>
             </a:extLst>
           </p:cNvPr>
@@ -2739,6 +2760,7 @@
           <a:p>
             <a:fld id="{C1FF6DA9-008F-8B48-92A6-B652298478BF}" type="slidenum">
               <a:rPr lang="en-US" smtClean="0"/>
+              <a:pPr/>
               <a:t>‹#›</a:t>
             </a:fld>
             <a:endParaRPr lang="en-US"/>
@@ -2748,7 +2770,7 @@
     </p:spTree>
     <p:extLst>
       <p:ext uri="{BB962C8B-B14F-4D97-AF65-F5344CB8AC3E}">
-        <p14:creationId xmlns:p14="http://schemas.microsoft.com/office/powerpoint/2010/main" val="795275635"/>
+        <p14:creationId xmlns:p14="http://schemas.microsoft.com/office/powerpoint/2010/main" xmlns="" val="795275635"/>
       </p:ext>
     </p:extLst>
   </p:cSld>
@@ -2785,7 +2807,7 @@
           <p:cNvPr id="2" name="Заголовок 1">
             <a:extLst>
               <a:ext uri="{FF2B5EF4-FFF2-40B4-BE49-F238E27FC236}">
-                <a16:creationId xmlns:a16="http://schemas.microsoft.com/office/drawing/2014/main" id="{268BC7B9-EE6A-AAF4-5D79-97E889D841EE}"/>
+                <a16:creationId xmlns:a16="http://schemas.microsoft.com/office/drawing/2014/main" xmlns="" id="{268BC7B9-EE6A-AAF4-5D79-97E889D841EE}"/>
               </a:ext>
             </a:extLst>
           </p:cNvPr>
@@ -2823,7 +2845,7 @@
           <p:cNvPr id="3" name="Текст 2">
             <a:extLst>
               <a:ext uri="{FF2B5EF4-FFF2-40B4-BE49-F238E27FC236}">
-                <a16:creationId xmlns:a16="http://schemas.microsoft.com/office/drawing/2014/main" id="{48E2A57B-1DEC-34D0-98BA-1E66B0D5B427}"/>
+                <a16:creationId xmlns:a16="http://schemas.microsoft.com/office/drawing/2014/main" xmlns="" id="{48E2A57B-1DEC-34D0-98BA-1E66B0D5B427}"/>
               </a:ext>
             </a:extLst>
           </p:cNvPr>
@@ -2890,7 +2912,7 @@
           <p:cNvPr id="4" name="Дата 3">
             <a:extLst>
               <a:ext uri="{FF2B5EF4-FFF2-40B4-BE49-F238E27FC236}">
-                <a16:creationId xmlns:a16="http://schemas.microsoft.com/office/drawing/2014/main" id="{AF1B3625-CC17-74D5-324D-3042DAF06BE3}"/>
+                <a16:creationId xmlns:a16="http://schemas.microsoft.com/office/drawing/2014/main" xmlns="" id="{AF1B3625-CC17-74D5-324D-3042DAF06BE3}"/>
               </a:ext>
             </a:extLst>
           </p:cNvPr>
@@ -2926,6 +2948,7 @@
           <a:p>
             <a:fld id="{5BCAD085-E8A6-8845-BD4E-CB4CCA059FC4}" type="datetimeFigureOut">
               <a:rPr lang="en-US" smtClean="0"/>
+              <a:pPr/>
               <a:t>3/6/2026</a:t>
             </a:fld>
             <a:endParaRPr lang="en-US"/>
@@ -2937,7 +2960,7 @@
           <p:cNvPr id="5" name="Нижний колонтитул 4">
             <a:extLst>
               <a:ext uri="{FF2B5EF4-FFF2-40B4-BE49-F238E27FC236}">
-                <a16:creationId xmlns:a16="http://schemas.microsoft.com/office/drawing/2014/main" id="{EFBEBA66-B863-6D24-293F-D45FCDDBD49F}"/>
+                <a16:creationId xmlns:a16="http://schemas.microsoft.com/office/drawing/2014/main" xmlns="" id="{EFBEBA66-B863-6D24-293F-D45FCDDBD49F}"/>
               </a:ext>
             </a:extLst>
           </p:cNvPr>
@@ -2980,7 +3003,7 @@
           <p:cNvPr id="6" name="Номер слайда 5">
             <a:extLst>
               <a:ext uri="{FF2B5EF4-FFF2-40B4-BE49-F238E27FC236}">
-                <a16:creationId xmlns:a16="http://schemas.microsoft.com/office/drawing/2014/main" id="{14FF0999-1759-30C3-2D07-F370DE5237D7}"/>
+                <a16:creationId xmlns:a16="http://schemas.microsoft.com/office/drawing/2014/main" xmlns="" id="{14FF0999-1759-30C3-2D07-F370DE5237D7}"/>
               </a:ext>
             </a:extLst>
           </p:cNvPr>
@@ -3016,6 +3039,7 @@
           <a:p>
             <a:fld id="{C1FF6DA9-008F-8B48-92A6-B652298478BF}" type="slidenum">
               <a:rPr lang="en-US" smtClean="0"/>
+              <a:pPr/>
               <a:t>‹#›</a:t>
             </a:fld>
             <a:endParaRPr lang="en-US"/>
@@ -3025,7 +3049,7 @@
     </p:spTree>
     <p:extLst>
       <p:ext uri="{BB962C8B-B14F-4D97-AF65-F5344CB8AC3E}">
-        <p14:creationId xmlns:p14="http://schemas.microsoft.com/office/powerpoint/2010/main" val="3477255588"/>
+        <p14:creationId xmlns:p14="http://schemas.microsoft.com/office/powerpoint/2010/main" xmlns="" val="3477255588"/>
       </p:ext>
     </p:extLst>
   </p:cSld>
@@ -3355,7 +3379,9 @@
         </p:nvSpPr>
         <p:spPr/>
         <p:txBody>
-          <a:bodyPr/>
+          <a:bodyPr>
+            <a:normAutofit fontScale="90000"/>
+          </a:bodyPr>
           <a:lstStyle/>
           <a:p>
             <a:r>
@@ -3487,7 +3513,7 @@
         <p:spPr>
           <a:xfrm>
             <a:off x="731520" y="1645920"/>
-            <a:ext cx="11612880" cy="4572000"/>
+            <a:ext cx="11612880" cy="2343655"/>
           </a:xfrm>
           <a:prstGeom prst="rect">
             <a:avLst/>
@@ -3501,6 +3527,9 @@
           <a:lstStyle/>
           <a:p>
             <a:pPr>
+              <a:lnSpc>
+                <a:spcPct val="150000"/>
+              </a:lnSpc>
               <a:defRPr sz="2000">
                 <a:solidFill>
                   <a:srgbClr val="2B2B2B"/>
@@ -3508,11 +3537,60 @@
               </a:defRPr>
             </a:pPr>
             <a:r>
-              <a:t>Auth: регистрация, вход, восстановление пароля (OTP), смена пароля</a:t>
-            </a:r>
+              <a:rPr dirty="0"/>
+              <a:t>Auth: </a:t>
+            </a:r>
+            <a:r>
+              <a:rPr dirty="0" err="1"/>
+              <a:t>регистрация</a:t>
+            </a:r>
+            <a:r>
+              <a:rPr dirty="0"/>
+              <a:t>, </a:t>
+            </a:r>
+            <a:r>
+              <a:rPr dirty="0" err="1"/>
+              <a:t>вход</a:t>
+            </a:r>
+            <a:r>
+              <a:rPr dirty="0"/>
+              <a:t>, </a:t>
+            </a:r>
+            <a:r>
+              <a:rPr dirty="0" err="1"/>
+              <a:t>восстановление</a:t>
+            </a:r>
+            <a:r>
+              <a:rPr dirty="0"/>
+              <a:t> </a:t>
+            </a:r>
+            <a:r>
+              <a:rPr dirty="0" err="1"/>
+              <a:t>пароля</a:t>
+            </a:r>
+            <a:r>
+              <a:rPr dirty="0"/>
+              <a:t> (OTP), </a:t>
+            </a:r>
+            <a:r>
+              <a:rPr dirty="0" err="1"/>
+              <a:t>смена</a:t>
+            </a:r>
+            <a:r>
+              <a:rPr dirty="0"/>
+              <a:t> </a:t>
+            </a:r>
+            <a:r>
+              <a:rPr dirty="0" err="1"/>
+              <a:t>пароля</a:t>
+            </a:r>
+            <a:endParaRPr dirty="0"/>
           </a:p>
           <a:p>
             <a:pPr>
+              <a:lnSpc>
+                <a:spcPct val="150000"/>
+              </a:lnSpc>
               <a:defRPr sz="2000">
                 <a:solidFill>
                   <a:srgbClr val="2B2B2B"/>
@@ -3520,11 +3598,32 @@
               </a:defRPr>
             </a:pPr>
             <a:r>
-              <a:t>Onboarding + системный SplashScreen</a:t>
-            </a:r>
+              <a:rPr dirty="0" err="1"/>
+              <a:t>Onboarding</a:t>
+            </a:r>
+            <a:r>
+              <a:rPr dirty="0"/>
+              <a:t> + </a:t>
+            </a:r>
+            <a:r>
+              <a:rPr dirty="0" err="1"/>
+              <a:t>системный</a:t>
+            </a:r>
+            <a:r>
+              <a:rPr dirty="0"/>
+              <a:t> </a:t>
+            </a:r>
+            <a:r>
+              <a:rPr dirty="0" err="1"/>
+              <a:t>SplashScreen</a:t>
+            </a:r>
+            <a:endParaRPr dirty="0"/>
           </a:p>
           <a:p>
             <a:pPr>
+              <a:lnSpc>
+                <a:spcPct val="150000"/>
+              </a:lnSpc>
               <a:defRPr sz="2000">
                 <a:solidFill>
                   <a:srgbClr val="2B2B2B"/>
@@ -3532,11 +3631,44 @@
               </a:defRPr>
             </a:pPr>
             <a:r>
-              <a:t>Home: категории, товары, детали товара</a:t>
-            </a:r>
+              <a:rPr dirty="0"/>
+              <a:t>Home: </a:t>
+            </a:r>
+            <a:r>
+              <a:rPr dirty="0" err="1"/>
+              <a:t>категории</a:t>
+            </a:r>
+            <a:r>
+              <a:rPr dirty="0"/>
+              <a:t>, </a:t>
+            </a:r>
+            <a:r>
+              <a:rPr dirty="0" err="1"/>
+              <a:t>товары</a:t>
+            </a:r>
+            <a:r>
+              <a:rPr dirty="0"/>
+              <a:t>, </a:t>
+            </a:r>
+            <a:r>
+              <a:rPr dirty="0" err="1"/>
+              <a:t>детали</a:t>
+            </a:r>
+            <a:r>
+              <a:rPr dirty="0"/>
+              <a:t> </a:t>
+            </a:r>
+            <a:r>
+              <a:rPr dirty="0" err="1"/>
+              <a:t>товара</a:t>
+            </a:r>
+            <a:endParaRPr dirty="0"/>
           </a:p>
           <a:p>
             <a:pPr>
+              <a:lnSpc>
+                <a:spcPct val="150000"/>
+              </a:lnSpc>
               <a:defRPr sz="2000">
                 <a:solidFill>
                   <a:srgbClr val="2B2B2B"/>
@@ -3544,11 +3676,28 @@
               </a:defRPr>
             </a:pPr>
             <a:r>
-              <a:t>Favorite: избранное пользователя</a:t>
-            </a:r>
+              <a:rPr dirty="0"/>
+              <a:t>Favorite: </a:t>
+            </a:r>
+            <a:r>
+              <a:rPr dirty="0" err="1"/>
+              <a:t>избранное</a:t>
+            </a:r>
+            <a:r>
+              <a:rPr dirty="0"/>
+              <a:t> </a:t>
+            </a:r>
+            <a:r>
+              <a:rPr dirty="0" err="1"/>
+              <a:t>пользователя</a:t>
+            </a:r>
+            <a:endParaRPr dirty="0"/>
           </a:p>
           <a:p>
             <a:pPr>
+              <a:lnSpc>
+                <a:spcPct val="150000"/>
+              </a:lnSpc>
               <a:defRPr sz="2000">
                 <a:solidFill>
                   <a:srgbClr val="2B2B2B"/>
@@ -3556,8 +3705,62 @@
               </a:defRPr>
             </a:pPr>
             <a:r>
-              <a:t>Profile: просмотр/редактирование, фото с камеры, сохранение на сервер</a:t>
-            </a:r>
+              <a:rPr dirty="0"/>
+              <a:t>Profile: </a:t>
+            </a:r>
+            <a:r>
+              <a:rPr dirty="0" err="1"/>
+              <a:t>просмотр</a:t>
+            </a:r>
+            <a:r>
+              <a:rPr dirty="0"/>
+              <a:t>/</a:t>
+            </a:r>
+            <a:r>
+              <a:rPr dirty="0" err="1"/>
+              <a:t>редактирование</a:t>
+            </a:r>
+            <a:r>
+              <a:rPr dirty="0"/>
+              <a:t>, </a:t>
+            </a:r>
+            <a:r>
+              <a:rPr dirty="0" err="1"/>
+              <a:t>фото</a:t>
+            </a:r>
+            <a:r>
+              <a:rPr dirty="0"/>
+              <a:t> с </a:t>
+            </a:r>
+            <a:r>
+              <a:rPr dirty="0" err="1"/>
+              <a:t>камеры</a:t>
+            </a:r>
+            <a:r>
+              <a:rPr dirty="0"/>
+              <a:t>, </a:t>
+            </a:r>
+            <a:r>
+              <a:rPr dirty="0" err="1"/>
+              <a:t>сохранение</a:t>
+            </a:r>
+            <a:r>
+              <a:rPr dirty="0"/>
+              <a:t> </a:t>
+            </a:r>
+            <a:r>
+              <a:rPr dirty="0" err="1"/>
+              <a:t>на</a:t>
+            </a:r>
+            <a:r>
+              <a:rPr dirty="0"/>
+              <a:t> </a:t>
+            </a:r>
+            <a:r>
+              <a:rPr dirty="0" err="1"/>
+              <a:t>сервер</a:t>
+            </a:r>
+            <a:endParaRPr dirty="0"/>
           </a:p>
         </p:txBody>
       </p:sp>
@@ -3603,12 +3806,52 @@
           <a:p>
             <a:pPr algn="l"/>
             <a:r>
-              <a:rPr sz="3600" b="1">
+              <a:rPr sz="3600" b="1" dirty="0" err="1">
                 <a:solidFill>
                   <a:srgbClr val="2B2B2B"/>
                 </a:solidFill>
               </a:rPr>
-              <a:t>Диаграмма вариантов использования (Use Case)</a:t>
+              <a:t>Диаграмма</a:t>
+            </a:r>
+            <a:r>
+              <a:rPr sz="3600" b="1" dirty="0">
+                <a:solidFill>
+                  <a:srgbClr val="2B2B2B"/>
+                </a:solidFill>
+              </a:rPr>
+              <a:t> </a:t>
+            </a:r>
+            <a:r>
+              <a:rPr sz="3600" b="1" dirty="0" err="1">
+                <a:solidFill>
+                  <a:srgbClr val="2B2B2B"/>
+                </a:solidFill>
+              </a:rPr>
+              <a:t>вариантов</a:t>
+            </a:r>
+            <a:r>
+              <a:rPr sz="3600" b="1" dirty="0">
+                <a:solidFill>
+                  <a:srgbClr val="2B2B2B"/>
+                </a:solidFill>
+              </a:rPr>
+              <a:t> </a:t>
+            </a:r>
+            <a:r>
+              <a:rPr sz="3600" b="1" dirty="0" err="1">
+                <a:solidFill>
+                  <a:srgbClr val="2B2B2B"/>
+                </a:solidFill>
+              </a:rPr>
+              <a:t>использования</a:t>
+            </a:r>
+            <a:r>
+              <a:rPr sz="3600" b="1" dirty="0">
+                <a:solidFill>
+                  <a:srgbClr val="2B2B2B"/>
+                </a:solidFill>
+              </a:rPr>
+              <a:t> (Use Case)</a:t>
             </a:r>
           </a:p>
         </p:txBody>
@@ -3629,8 +3872,8 @@
         </p:blipFill>
         <p:spPr>
           <a:xfrm>
-            <a:off x="1697398" y="1330014"/>
-            <a:ext cx="8794028" cy="5162860"/>
+            <a:off x="1975449" y="1665446"/>
+            <a:ext cx="8222678" cy="4827427"/>
           </a:xfrm>
           <a:prstGeom prst="rect">
             <a:avLst/>
@@ -3698,7 +3941,7 @@
         <p:spPr>
           <a:xfrm>
             <a:off x="731520" y="1645920"/>
-            <a:ext cx="11612880" cy="4572000"/>
+            <a:ext cx="11612880" cy="1420325"/>
           </a:xfrm>
           <a:prstGeom prst="rect">
             <a:avLst/>
@@ -3712,6 +3955,9 @@
           <a:lstStyle/>
           <a:p>
             <a:pPr>
+              <a:lnSpc>
+                <a:spcPct val="150000"/>
+              </a:lnSpc>
               <a:defRPr sz="2000">
                 <a:solidFill>
                   <a:srgbClr val="2B2B2B"/>
@@ -3719,11 +3965,19 @@
               </a:defRPr>
             </a:pPr>
             <a:r>
-              <a:t>Подход: MVVM + Repository, Compose Navigation</a:t>
+              <a:rPr dirty="0" err="1"/>
+              <a:t>Подход</a:t>
+            </a:r>
+            <a:r>
+              <a:rPr dirty="0"/>
+              <a:t>: MVVM + Repository, Compose Navigation</a:t>
             </a:r>
           </a:p>
           <a:p>
             <a:pPr>
+              <a:lnSpc>
+                <a:spcPct val="150000"/>
+              </a:lnSpc>
               <a:defRPr sz="2000">
                 <a:solidFill>
                   <a:srgbClr val="2B2B2B"/>
@@ -3731,11 +3985,47 @@
               </a:defRPr>
             </a:pPr>
             <a:r>
-              <a:t>UI (Compose) → ViewModel (StateFlow) → Repository → Supabase (Auth/Postgrest/Storage)</a:t>
+              <a:rPr dirty="0"/>
+              <a:t>UI (Compose) → </a:t>
+            </a:r>
+            <a:r>
+              <a:rPr dirty="0" err="1"/>
+              <a:t>ViewModel</a:t>
+            </a:r>
+            <a:r>
+              <a:rPr dirty="0"/>
+              <a:t> (</a:t>
+            </a:r>
+            <a:r>
+              <a:rPr dirty="0" err="1"/>
+              <a:t>StateFlow</a:t>
+            </a:r>
+            <a:r>
+              <a:rPr dirty="0"/>
+              <a:t>) → Repository → </a:t>
+            </a:r>
+            <a:r>
+              <a:rPr dirty="0" err="1"/>
+              <a:t>Supabase</a:t>
+            </a:r>
+            <a:r>
+              <a:rPr dirty="0"/>
+              <a:t> (Auth/</a:t>
+            </a:r>
+            <a:r>
+              <a:rPr dirty="0" err="1"/>
+              <a:t>Postgrest</a:t>
+            </a:r>
+            <a:r>
+              <a:rPr dirty="0"/>
+              <a:t>/Storage)</a:t>
             </a:r>
           </a:p>
           <a:p>
             <a:pPr>
+              <a:lnSpc>
+                <a:spcPct val="150000"/>
+              </a:lnSpc>
               <a:defRPr sz="2000">
                 <a:solidFill>
                   <a:srgbClr val="2B2B2B"/>
@@ -3743,7 +4033,12 @@
               </a:defRPr>
             </a:pPr>
             <a:r>
-              <a:t>Состояния: loading / error (dialog) / data</a:t>
+              <a:rPr dirty="0" err="1"/>
+              <a:t>Состояния</a:t>
+            </a:r>
+            <a:r>
+              <a:rPr dirty="0"/>
+              <a:t>: loading / error (dialog) / data</a:t>
             </a:r>
           </a:p>
         </p:txBody>
@@ -3809,7 +4104,7 @@
         <p:spPr>
           <a:xfrm>
             <a:off x="731520" y="1645920"/>
-            <a:ext cx="11612880" cy="4572000"/>
+            <a:ext cx="11612880" cy="1881990"/>
           </a:xfrm>
           <a:prstGeom prst="rect">
             <a:avLst/>
@@ -3823,6 +4118,9 @@
           <a:lstStyle/>
           <a:p>
             <a:pPr>
+              <a:lnSpc>
+                <a:spcPct val="150000"/>
+              </a:lnSpc>
               <a:defRPr sz="2000">
                 <a:solidFill>
                   <a:srgbClr val="2B2B2B"/>
@@ -3830,11 +4128,27 @@
               </a:defRPr>
             </a:pPr>
             <a:r>
-              <a:t>Таблицы: categories, products, favourite, profiles</a:t>
+              <a:rPr dirty="0" err="1"/>
+              <a:t>Таблицы</a:t>
+            </a:r>
+            <a:r>
+              <a:rPr dirty="0"/>
+              <a:t>: categories, products, </a:t>
+            </a:r>
+            <a:r>
+              <a:rPr dirty="0" err="1"/>
+              <a:t>favourite</a:t>
+            </a:r>
+            <a:r>
+              <a:rPr dirty="0"/>
+              <a:t>, profiles</a:t>
             </a:r>
           </a:p>
           <a:p>
             <a:pPr>
+              <a:lnSpc>
+                <a:spcPct val="150000"/>
+              </a:lnSpc>
               <a:defRPr sz="2000">
                 <a:solidFill>
                   <a:srgbClr val="2B2B2B"/>
@@ -3842,11 +4156,15 @@
               </a:defRPr>
             </a:pPr>
             <a:r>
+              <a:rPr dirty="0"/>
               <a:t>Auth: email/password + OTP</a:t>
             </a:r>
           </a:p>
           <a:p>
             <a:pPr>
+              <a:lnSpc>
+                <a:spcPct val="150000"/>
+              </a:lnSpc>
               <a:defRPr sz="2000">
                 <a:solidFill>
                   <a:srgbClr val="2B2B2B"/>
@@ -3854,11 +4172,47 @@
               </a:defRPr>
             </a:pPr>
             <a:r>
-              <a:t>Storage products: &lt;productId&gt;-&lt;variant&gt;.png (варианты товара)</a:t>
+              <a:rPr dirty="0"/>
+              <a:t>Storage products: &lt;</a:t>
+            </a:r>
+            <a:r>
+              <a:rPr dirty="0" err="1"/>
+              <a:t>productId</a:t>
+            </a:r>
+            <a:r>
+              <a:rPr dirty="0"/>
+              <a:t>&gt;-&lt;variant&gt;.</a:t>
+            </a:r>
+            <a:r>
+              <a:rPr dirty="0" err="1"/>
+              <a:t>png</a:t>
+            </a:r>
+            <a:r>
+              <a:rPr dirty="0"/>
+              <a:t> (</a:t>
+            </a:r>
+            <a:r>
+              <a:rPr dirty="0" err="1"/>
+              <a:t>варианты</a:t>
+            </a:r>
+            <a:r>
+              <a:rPr dirty="0"/>
+              <a:t> </a:t>
+            </a:r>
+            <a:r>
+              <a:rPr dirty="0" err="1"/>
+              <a:t>товара</a:t>
+            </a:r>
+            <a:r>
+              <a:rPr dirty="0"/>
+              <a:t>)</a:t>
             </a:r>
           </a:p>
           <a:p>
             <a:pPr>
+              <a:lnSpc>
+                <a:spcPct val="150000"/>
+              </a:lnSpc>
               <a:defRPr sz="2000">
                 <a:solidFill>
                   <a:srgbClr val="2B2B2B"/>
@@ -3866,7 +4220,40 @@
               </a:defRPr>
             </a:pPr>
             <a:r>
-              <a:t>Storage avatars: &lt;userId&gt;.png (аватар профиля)</a:t>
+              <a:rPr dirty="0"/>
+              <a:t>Storage avatars: &lt;</a:t>
+            </a:r>
+            <a:r>
+              <a:rPr dirty="0" err="1"/>
+              <a:t>userId</a:t>
+            </a:r>
+            <a:r>
+              <a:rPr dirty="0"/>
+              <a:t>&gt;.</a:t>
+            </a:r>
+            <a:r>
+              <a:rPr dirty="0" err="1"/>
+              <a:t>png</a:t>
+            </a:r>
+            <a:r>
+              <a:rPr dirty="0"/>
+              <a:t> (</a:t>
+            </a:r>
+            <a:r>
+              <a:rPr dirty="0" err="1"/>
+              <a:t>аватар</a:t>
+            </a:r>
+            <a:r>
+              <a:rPr dirty="0"/>
+              <a:t> </a:t>
+            </a:r>
+            <a:r>
+              <a:rPr dirty="0" err="1"/>
+              <a:t>профиля</a:t>
+            </a:r>
+            <a:r>
+              <a:rPr dirty="0"/>
+              <a:t>)</a:t>
             </a:r>
           </a:p>
         </p:txBody>
@@ -3913,13 +4300,50 @@
           <a:p>
             <a:pPr algn="l"/>
             <a:r>
-              <a:rPr sz="3600" b="1">
+              <a:rPr sz="3600" b="1" dirty="0" err="1">
                 <a:solidFill>
                   <a:srgbClr val="2B2B2B"/>
                 </a:solidFill>
               </a:rPr>
-              <a:t>Навигация и обработка состояний</a:t>
-            </a:r>
+              <a:t>Навигация</a:t>
+            </a:r>
+            <a:r>
+              <a:rPr sz="3600" b="1" dirty="0">
+                <a:solidFill>
+                  <a:srgbClr val="2B2B2B"/>
+                </a:solidFill>
+              </a:rPr>
+              <a:t> и </a:t>
+            </a:r>
+            <a:r>
+              <a:rPr sz="3600" b="1" dirty="0" err="1">
+                <a:solidFill>
+                  <a:srgbClr val="2B2B2B"/>
+                </a:solidFill>
+              </a:rPr>
+              <a:t>обработка</a:t>
+            </a:r>
+            <a:r>
+              <a:rPr sz="3600" b="1" dirty="0">
+                <a:solidFill>
+                  <a:srgbClr val="2B2B2B"/>
+                </a:solidFill>
+              </a:rPr>
+              <a:t> </a:t>
+            </a:r>
+            <a:r>
+              <a:rPr sz="3600" b="1" dirty="0" err="1">
+                <a:solidFill>
+                  <a:srgbClr val="2B2B2B"/>
+                </a:solidFill>
+              </a:rPr>
+              <a:t>состояний</a:t>
+            </a:r>
+            <a:endParaRPr sz="3600" b="1" dirty="0">
+              <a:solidFill>
+                <a:srgbClr val="2B2B2B"/>
+              </a:solidFill>
+            </a:endParaRPr>
           </a:p>
         </p:txBody>
       </p:sp>
@@ -3932,7 +4356,7 @@
         <p:spPr>
           <a:xfrm>
             <a:off x="731520" y="1645920"/>
-            <a:ext cx="11612880" cy="4572000"/>
+            <a:ext cx="11612880" cy="4154984"/>
           </a:xfrm>
           <a:prstGeom prst="rect">
             <a:avLst/>
@@ -3945,7 +4369,180 @@
           </a:bodyPr>
           <a:lstStyle/>
           <a:p>
+            <a:r>
+              <a:rPr lang="en-US" dirty="0" smtClean="0"/>
+              <a:t/>
+            </a:r>
+            <a:br>
+              <a:rPr lang="en-US" dirty="0" smtClean="0"/>
+            </a:br>
+            <a:r>
+              <a:rPr lang="en-US" dirty="0" smtClean="0"/>
+              <a:t>Onboard → </a:t>
+            </a:r>
+            <a:r>
+              <a:rPr lang="en-US" dirty="0" err="1" smtClean="0"/>
+              <a:t>SignIn</a:t>
+            </a:r>
+            <a:r>
+              <a:rPr lang="en-US" dirty="0" smtClean="0"/>
+              <a:t> → </a:t>
+            </a:r>
+            <a:r>
+              <a:rPr lang="en-US" dirty="0" smtClean="0"/>
+              <a:t>Home</a:t>
+            </a:r>
+            <a:r>
+              <a:rPr lang="en-US" dirty="0" smtClean="0"/>
+              <a:t/>
+            </a:r>
+            <a:br>
+              <a:rPr lang="en-US" dirty="0" smtClean="0"/>
+            </a:br>
+            <a:r>
+              <a:rPr lang="en-US" dirty="0" err="1" smtClean="0"/>
+              <a:t>SignIn</a:t>
+            </a:r>
+            <a:r>
+              <a:rPr lang="en-US" dirty="0" smtClean="0"/>
+              <a:t> ↔ Register</a:t>
+            </a:r>
+            <a:br>
+              <a:rPr lang="en-US" dirty="0" smtClean="0"/>
+            </a:br>
+            <a:r>
+              <a:rPr lang="en-US" dirty="0" err="1" smtClean="0"/>
+              <a:t>SignIn</a:t>
+            </a:r>
+            <a:r>
+              <a:rPr lang="en-US" dirty="0" smtClean="0"/>
+              <a:t> → </a:t>
+            </a:r>
+            <a:r>
+              <a:rPr lang="en-US" dirty="0" err="1" smtClean="0"/>
+              <a:t>ForgotPassword</a:t>
+            </a:r>
+            <a:r>
+              <a:rPr lang="en-US" dirty="0" smtClean="0"/>
+              <a:t> → Verification → </a:t>
+            </a:r>
+            <a:r>
+              <a:rPr lang="en-US" dirty="0" err="1" smtClean="0"/>
+              <a:t>CreateNewPassword</a:t>
+            </a:r>
+            <a:r>
+              <a:rPr lang="en-US" dirty="0" smtClean="0"/>
+              <a:t> → </a:t>
+            </a:r>
+            <a:r>
+              <a:rPr lang="en-US" dirty="0" err="1" smtClean="0"/>
+              <a:t>SignIn</a:t>
+            </a:r>
+            <a:r>
+              <a:rPr lang="en-US" dirty="0" smtClean="0"/>
+              <a:t/>
+            </a:r>
+            <a:br>
+              <a:rPr lang="en-US" dirty="0" smtClean="0"/>
+            </a:br>
+            <a:r>
+              <a:rPr lang="en-US" dirty="0" smtClean="0"/>
+              <a:t>Home ↔ Favorite</a:t>
+            </a:r>
+            <a:br>
+              <a:rPr lang="en-US" dirty="0" smtClean="0"/>
+            </a:br>
+            <a:r>
+              <a:rPr lang="en-US" dirty="0" smtClean="0"/>
+              <a:t>Home ↔ Orders</a:t>
+            </a:r>
+            <a:br>
+              <a:rPr lang="en-US" dirty="0" smtClean="0"/>
+            </a:br>
+            <a:r>
+              <a:rPr lang="en-US" dirty="0" smtClean="0"/>
+              <a:t>Home ↔ </a:t>
+            </a:r>
+            <a:r>
+              <a:rPr lang="en-US" dirty="0" smtClean="0"/>
+              <a:t>Profile</a:t>
+            </a:r>
+            <a:r>
+              <a:rPr lang="en-US" dirty="0" smtClean="0"/>
+              <a:t/>
+            </a:r>
+            <a:br>
+              <a:rPr lang="en-US" dirty="0" smtClean="0"/>
+            </a:br>
+            <a:r>
+              <a:rPr lang="en-US" dirty="0" smtClean="0"/>
+              <a:t>Home → Details</a:t>
+            </a:r>
+            <a:br>
+              <a:rPr lang="en-US" dirty="0" smtClean="0"/>
+            </a:br>
+            <a:r>
+              <a:rPr lang="en-US" dirty="0" smtClean="0"/>
+              <a:t>Favorite → Details</a:t>
+            </a:r>
+            <a:br>
+              <a:rPr lang="en-US" dirty="0" smtClean="0"/>
+            </a:br>
+            <a:r>
+              <a:rPr lang="en-US" dirty="0" smtClean="0"/>
+              <a:t>Details → Home (back</a:t>
+            </a:r>
+            <a:r>
+              <a:rPr lang="en-US" dirty="0" smtClean="0"/>
+              <a:t>)</a:t>
+            </a:r>
+            <a:r>
+              <a:rPr lang="en-US" dirty="0" smtClean="0"/>
+              <a:t/>
+            </a:r>
+            <a:br>
+              <a:rPr lang="en-US" dirty="0" smtClean="0"/>
+            </a:br>
+            <a:r>
+              <a:rPr lang="en-US" dirty="0" smtClean="0"/>
+              <a:t>Home (FAB) → Cart → Checkout → Home</a:t>
+            </a:r>
+            <a:br>
+              <a:rPr lang="en-US" dirty="0" smtClean="0"/>
+            </a:br>
+            <a:r>
+              <a:rPr lang="en-US" dirty="0" smtClean="0"/>
+              <a:t>Details (FAB) → </a:t>
+            </a:r>
+            <a:r>
+              <a:rPr lang="en-US" dirty="0" smtClean="0"/>
+              <a:t>Cart</a:t>
+            </a:r>
+            <a:r>
+              <a:rPr lang="en-US" dirty="0" smtClean="0"/>
+              <a:t/>
+            </a:r>
+            <a:br>
+              <a:rPr lang="en-US" dirty="0" smtClean="0"/>
+            </a:br>
+            <a:r>
+              <a:rPr lang="en-US" dirty="0" smtClean="0"/>
+              <a:t>Orders → </a:t>
+            </a:r>
+            <a:r>
+              <a:rPr lang="en-US" dirty="0" err="1" smtClean="0"/>
+              <a:t>OrderDetail</a:t>
+            </a:r>
+            <a:r>
+              <a:rPr lang="en-US" dirty="0" smtClean="0"/>
+              <a:t> → Orders (back)</a:t>
+            </a:r>
+          </a:p>
+          <a:p>
             <a:pPr>
+              <a:lnSpc>
+                <a:spcPct val="150000"/>
+              </a:lnSpc>
               <a:defRPr sz="2000">
                 <a:solidFill>
                   <a:srgbClr val="2B2B2B"/>
@@ -3953,44 +4550,70 @@
               </a:defRPr>
             </a:pPr>
             <a:r>
-              <a:t>Onboard → SignIn → Home → Details</a:t>
-            </a:r>
-          </a:p>
-          <a:p>
-            <a:pPr>
-              <a:defRPr sz="2000">
-                <a:solidFill>
-                  <a:srgbClr val="2B2B2B"/>
-                </a:solidFill>
-              </a:defRPr>
-            </a:pPr>
-            <a:r>
-              <a:t>Home ↔ Favorite, Home ↔ Profile</a:t>
-            </a:r>
-          </a:p>
-          <a:p>
-            <a:pPr>
-              <a:defRPr sz="2000">
-                <a:solidFill>
-                  <a:srgbClr val="2B2B2B"/>
-                </a:solidFill>
-              </a:defRPr>
-            </a:pPr>
-            <a:r>
-              <a:t>ForgotPassword → Verification → CreateNewPassword → SignIn</a:t>
-            </a:r>
-          </a:p>
-          <a:p>
-            <a:pPr>
-              <a:defRPr sz="2000">
-                <a:solidFill>
-                  <a:srgbClr val="2B2B2B"/>
-                </a:solidFill>
-              </a:defRPr>
-            </a:pPr>
-            <a:r>
-              <a:t>Индикатор загрузки при запросах; ошибки — в диалоге (закрывается пользователем)</a:t>
-            </a:r>
+              <a:rPr dirty="0" err="1" smtClean="0"/>
+              <a:t>Индикатор</a:t>
+            </a:r>
+            <a:r>
+              <a:rPr dirty="0" smtClean="0"/>
+              <a:t> </a:t>
+            </a:r>
+            <a:r>
+              <a:rPr dirty="0" err="1" smtClean="0"/>
+              <a:t>загрузки</a:t>
+            </a:r>
+            <a:r>
+              <a:rPr dirty="0" smtClean="0"/>
+              <a:t> </a:t>
+            </a:r>
+            <a:r>
+              <a:rPr dirty="0" err="1" smtClean="0"/>
+              <a:t>при</a:t>
+            </a:r>
+            <a:r>
+              <a:rPr dirty="0" smtClean="0"/>
+              <a:t> </a:t>
+            </a:r>
+            <a:r>
+              <a:rPr dirty="0" err="1" smtClean="0"/>
+              <a:t>запросах</a:t>
+            </a:r>
+            <a:r>
+              <a:rPr dirty="0" smtClean="0"/>
+              <a:t>; </a:t>
+            </a:r>
+            <a:r>
+              <a:rPr dirty="0" err="1" smtClean="0"/>
+              <a:t>ошибки</a:t>
+            </a:r>
+            <a:r>
+              <a:rPr dirty="0" smtClean="0"/>
+              <a:t> — в </a:t>
+            </a:r>
+            <a:r>
+              <a:rPr dirty="0" err="1" smtClean="0"/>
+              <a:t>диалоге</a:t>
+            </a:r>
+            <a:r>
+              <a:rPr dirty="0" smtClean="0"/>
+              <a:t> (</a:t>
+            </a:r>
+            <a:r>
+              <a:rPr dirty="0" err="1" smtClean="0"/>
+              <a:t>закрывается</a:t>
+            </a:r>
+            <a:r>
+              <a:rPr dirty="0" smtClean="0"/>
+              <a:t> </a:t>
+            </a:r>
+            <a:r>
+              <a:rPr dirty="0" err="1" smtClean="0"/>
+              <a:t>пользователем</a:t>
+            </a:r>
+            <a:r>
+              <a:rPr dirty="0" smtClean="0"/>
+              <a:t>)</a:t>
+            </a:r>
+            <a:endParaRPr dirty="0"/>
           </a:p>
         </p:txBody>
       </p:sp>
@@ -4055,7 +4678,7 @@
         <p:spPr>
           <a:xfrm>
             <a:off x="731520" y="1645920"/>
-            <a:ext cx="11612880" cy="1323439"/>
+            <a:ext cx="11612880" cy="1881990"/>
           </a:xfrm>
           <a:prstGeom prst="rect">
             <a:avLst/>
@@ -4069,6 +4692,9 @@
           <a:lstStyle/>
           <a:p>
             <a:pPr>
+              <a:lnSpc>
+                <a:spcPct val="150000"/>
+              </a:lnSpc>
               <a:defRPr sz="2000">
                 <a:solidFill>
                   <a:srgbClr val="2B2B2B"/>
@@ -4110,6 +4736,9 @@
           </a:p>
           <a:p>
             <a:pPr>
+              <a:lnSpc>
+                <a:spcPct val="150000"/>
+              </a:lnSpc>
               <a:defRPr sz="2000">
                 <a:solidFill>
                   <a:srgbClr val="2B2B2B"/>
@@ -4139,6 +4768,9 @@
           </a:p>
           <a:p>
             <a:pPr>
+              <a:lnSpc>
+                <a:spcPct val="150000"/>
+              </a:lnSpc>
               <a:defRPr sz="2000">
                 <a:solidFill>
                   <a:srgbClr val="2B2B2B"/>
@@ -4168,6 +4800,9 @@
           </a:p>
           <a:p>
             <a:pPr>
+              <a:lnSpc>
+                <a:spcPct val="150000"/>
+              </a:lnSpc>
               <a:defRPr sz="2000">
                 <a:solidFill>
                   <a:srgbClr val="2B2B2B"/>
@@ -4236,7 +4871,7 @@
     </a:clrScheme>
     <a:fontScheme name="Стандартная">
       <a:majorFont>
-        <a:latin typeface="Aptos Display" panose="02110004020202020204"/>
+        <a:latin typeface="Aptos Display"/>
         <a:ea typeface=""/>
         <a:cs typeface=""/>
         <a:font script="Jpan" typeface="游ゴシック Light"/>
@@ -4288,7 +4923,7 @@
         <a:font script="Tfng" typeface="Ebrima"/>
       </a:majorFont>
       <a:minorFont>
-        <a:latin typeface="Aptos" panose="02110004020202020204"/>
+        <a:latin typeface="Aptos"/>
         <a:ea typeface=""/>
         <a:cs typeface=""/>
         <a:font script="Jpan" typeface="游ゴシック"/>
@@ -4502,7 +5137,7 @@
   <a:extraClrSchemeLst/>
   <a:extLst>
     <a:ext uri="{05A4C25C-085E-4340-85A3-A5531E510DB2}">
-      <thm15:themeFamily xmlns:thm15="http://schemas.microsoft.com/office/thememl/2012/main" name="Office Theme" id="{2E142A2C-CD16-42D6-873A-C26D2A0506FA}" vid="{1BDDFF52-6CD6-40A5-AB3C-68EB2F1E4D0A}"/>
+      <thm15:themeFamily xmlns:thm15="http://schemas.microsoft.com/office/thememl/2012/main" xmlns="" name="Office Theme" id="{2E142A2C-CD16-42D6-873A-C26D2A0506FA}" vid="{1BDDFF52-6CD6-40A5-AB3C-68EB2F1E4D0A}"/>
     </a:ext>
   </a:extLst>
 </a:theme>
